--- a/public/investor/life-order-deck.pptx
+++ b/public/investor/life-order-deck.pptx
@@ -2716,7 +2716,7 @@
         </p:nvSpPr>
         <p:spPr>
           <a:xfrm>
-            <a:off x="548640" y="6400800"/>
+            <a:off x="548640" y="6172200"/>
             <a:ext cx="10972800" cy="274320"/>
           </a:xfrm>
           <a:prstGeom prst="rect">
